--- a/deliverables/帮扶村振兴管理系统详细介绍.pptx
+++ b/deliverables/帮扶村振兴管理系统详细介绍.pptx
@@ -6108,7 +6108,7 @@
               </a:defRPr>
             </a:pPr>
             <a:r>
-              <a:t>10,056</a:t>
+              <a:t>10,692</a:t>
             </a:r>
           </a:p>
         </p:txBody>
@@ -6259,7 +6259,7 @@
               </a:defRPr>
             </a:pPr>
             <a:r>
-              <a:t>1,622</a:t>
+              <a:t>5,691</a:t>
             </a:r>
           </a:p>
         </p:txBody>
@@ -6331,7 +6331,7 @@
               </a:defRPr>
             </a:pPr>
             <a:r>
-              <a:t>vitest 125文件</a:t>
+              <a:t>vitest 296文件</a:t>
             </a:r>
           </a:p>
         </p:txBody>
